--- a/public/fun/cards/food/food-31.pptx
+++ b/public/fun/cards/food/food-31.pptx
@@ -3085,7 +3085,7 @@
     <p:bg>
       <p:bgPr>
         <a:solidFill>
-          <a:srgbClr val="FBF8F2"/>
+          <a:srgbClr val="F3F4F6"/>
         </a:solidFill>
         <a:effectLst/>
       </p:bgPr>
@@ -3099,20 +3099,20 @@
       <p:grpSpPr/>
       <p:sp>
         <p:nvSpPr>
-          <p:cNvPr id="2" name="Rectangle 1"/>
+          <p:cNvPr id="2" name="Oval 1"/>
           <p:cNvSpPr/>
           <p:nvPr/>
         </p:nvSpPr>
         <p:spPr>
           <a:xfrm>
-            <a:off x="0" y="0"/>
-            <a:ext cx="165600" cy="1800000"/>
+            <a:off x="547200" y="475200"/>
+            <a:ext cx="849600" cy="849600"/>
           </a:xfrm>
-          <a:prstGeom prst="rect">
+          <a:prstGeom prst="ellipse">
             <a:avLst/>
           </a:prstGeom>
           <a:solidFill>
-            <a:srgbClr val="7A5258"/>
+            <a:srgbClr val="F5E8E3"/>
           </a:solidFill>
           <a:ln>
             <a:noFill/>
@@ -3128,20 +3128,22 @@
       </p:sp>
       <p:sp>
         <p:nvSpPr>
-          <p:cNvPr id="3" name="Rectangle 2"/>
+          <p:cNvPr id="3" name="Oval 2"/>
           <p:cNvSpPr/>
           <p:nvPr/>
         </p:nvSpPr>
         <p:spPr>
           <a:xfrm>
-            <a:off x="165600" y="0"/>
-            <a:ext cx="36000" cy="1800000"/>
+            <a:off x="187200" y="475200"/>
+            <a:ext cx="849600" cy="849600"/>
           </a:xfrm>
-          <a:prstGeom prst="rect">
+          <a:prstGeom prst="ellipse">
             <a:avLst/>
           </a:prstGeom>
           <a:solidFill>
-            <a:srgbClr val="DACFD0"/>
+            <a:srgbClr val="FF9E6B">
+              <a:alpha val="92000"/>
+            </a:srgbClr>
           </a:solidFill>
           <a:ln>
             <a:noFill/>
@@ -3157,170 +3159,14 @@
       </p:sp>
       <p:sp>
         <p:nvSpPr>
-          <p:cNvPr id="4" name="Freeform 3"/>
-          <p:cNvSpPr/>
+          <p:cNvPr id="4" name="텍스트"/>
+          <p:cNvSpPr txBox="1"/>
           <p:nvPr/>
         </p:nvSpPr>
         <p:spPr>
           <a:xfrm>
-            <a:off x="2669760" y="378000"/>
-            <a:ext cx="276480" cy="117504"/>
-          </a:xfrm>
-          <a:custGeom>
-            <a:avLst/>
-            <a:gdLst/>
-            <a:ahLst/>
-            <a:cxnLst/>
-            <a:rect l="l" t="t" r="r" b="b"/>
-            <a:pathLst>
-              <a:path w="276480" h="117504">
-                <a:moveTo>
-                  <a:pt x="276480" y="0"/>
-                </a:moveTo>
-                <a:lnTo>
-                  <a:pt x="273014" y="26147"/>
-                </a:lnTo>
-                <a:lnTo>
-                  <a:pt x="262790" y="50983"/>
-                </a:lnTo>
-                <a:lnTo>
-                  <a:pt x="246320" y="73263"/>
-                </a:lnTo>
-                <a:lnTo>
-                  <a:pt x="224431" y="91868"/>
-                </a:lnTo>
-                <a:lnTo>
-                  <a:pt x="198220" y="105867"/>
-                </a:lnTo>
-                <a:lnTo>
-                  <a:pt x="169001" y="114558"/>
-                </a:lnTo>
-                <a:lnTo>
-                  <a:pt x="138240" y="117504"/>
-                </a:lnTo>
-                <a:lnTo>
-                  <a:pt x="107479" y="114558"/>
-                </a:lnTo>
-                <a:lnTo>
-                  <a:pt x="78260" y="105867"/>
-                </a:lnTo>
-                <a:lnTo>
-                  <a:pt x="52049" y="91868"/>
-                </a:lnTo>
-                <a:lnTo>
-                  <a:pt x="30160" y="73263"/>
-                </a:lnTo>
-                <a:lnTo>
-                  <a:pt x="13690" y="50983"/>
-                </a:lnTo>
-                <a:lnTo>
-                  <a:pt x="3466" y="26147"/>
-                </a:lnTo>
-                <a:lnTo>
-                  <a:pt x="0" y="0"/>
-                </a:lnTo>
-                <a:close/>
-              </a:path>
-            </a:pathLst>
-          </a:custGeom>
-          <a:solidFill>
-            <a:srgbClr val="7A5258"/>
-          </a:solidFill>
-          <a:ln>
-            <a:noFill/>
-          </a:ln>
-        </p:spPr>
-        <p:txBody>
-          <a:bodyPr rtlCol="0" anchor="ctr"/>
-          <a:lstStyle/>
-          <a:p>
-            <a:pPr algn="ctr"/>
-          </a:p>
-        </p:txBody>
-      </p:sp>
-      <p:sp>
-        <p:nvSpPr>
-          <p:cNvPr id="5" name="Rounded Rectangle 4"/>
-          <p:cNvSpPr/>
-          <p:nvPr/>
-        </p:nvSpPr>
-        <p:spPr>
-          <a:xfrm>
-            <a:off x="2718144" y="492048"/>
-            <a:ext cx="179712" cy="24192"/>
-          </a:xfrm>
-          <a:prstGeom prst="roundRect">
-            <a:avLst>
-              <a:gd name="adj" fmla="val 42857"/>
-            </a:avLst>
-          </a:prstGeom>
-          <a:solidFill>
-            <a:srgbClr val="DACFD0"/>
-          </a:solidFill>
-          <a:ln>
-            <a:noFill/>
-          </a:ln>
-        </p:spPr>
-        <p:txBody>
-          <a:bodyPr rtlCol="0" anchor="ctr"/>
-          <a:lstStyle/>
-          <a:p>
-            <a:pPr algn="ctr"/>
-          </a:p>
-        </p:txBody>
-      </p:sp>
-      <p:cxnSp>
-        <p:nvCxnSpPr>
-          <p:cNvPr id="6" name="Connector 5"/>
-          <p:cNvCxnSpPr/>
-          <p:nvPr/>
-        </p:nvCxnSpPr>
-        <p:spPr>
-          <a:xfrm>
-            <a:off x="2787264" y="260496"/>
-            <a:ext cx="124416" cy="103680"/>
-          </a:xfrm>
-          <a:prstGeom prst="line">
-            <a:avLst/>
-          </a:prstGeom>
-          <a:ln w="17280">
-            <a:solidFill>
-              <a:srgbClr val="DACFD0"/>
-            </a:solidFill>
-          </a:ln>
-        </p:spPr>
-      </p:cxnSp>
-      <p:cxnSp>
-        <p:nvCxnSpPr>
-          <p:cNvPr id="7" name="Connector 6"/>
-          <p:cNvCxnSpPr/>
-          <p:nvPr/>
-        </p:nvCxnSpPr>
-        <p:spPr>
-          <a:xfrm>
-            <a:off x="2828736" y="260496"/>
-            <a:ext cx="117504" cy="89856"/>
-          </a:xfrm>
-          <a:prstGeom prst="line">
-            <a:avLst/>
-          </a:prstGeom>
-          <a:ln w="17280">
-            <a:solidFill>
-              <a:srgbClr val="DACFD0"/>
-            </a:solidFill>
-          </a:ln>
-        </p:spPr>
-      </p:cxnSp>
-      <p:sp>
-        <p:nvSpPr>
-          <p:cNvPr id="8" name="텍스트"/>
-          <p:cNvSpPr txBox="1"/>
-          <p:nvPr/>
-        </p:nvSpPr>
-        <p:spPr>
-          <a:xfrm>
-            <a:off x="396000" y="223200"/>
-            <a:ext cx="2016000" cy="108000"/>
+            <a:off x="1692000" y="223200"/>
+            <a:ext cx="1296000" cy="133351"/>
           </a:xfrm>
           <a:prstGeom prst="rect">
             <a:avLst/>
@@ -3335,13 +3181,13 @@
           <a:p>
             <a:pPr algn="l">
               <a:lnSpc>
-                <a:spcPts val="1087"/>
+                <a:spcPts val="1015"/>
               </a:lnSpc>
             </a:pPr>
             <a:r>
-              <a:rPr sz="750" b="1" spc="150">
+              <a:rPr sz="700" b="1" spc="200">
                 <a:solidFill>
-                  <a:srgbClr val="6C7477"/>
+                  <a:srgbClr val="6B7280"/>
                 </a:solidFill>
                 <a:latin typeface="맑은 고딕"/>
                 <a:ea typeface="맑은 고딕"/>
@@ -3353,14 +3199,14 @@
       </p:sp>
       <p:sp>
         <p:nvSpPr>
-          <p:cNvPr id="9" name="텍스트"/>
+          <p:cNvPr id="5" name="텍스트"/>
           <p:cNvSpPr txBox="1"/>
           <p:nvPr/>
         </p:nvSpPr>
         <p:spPr>
           <a:xfrm>
-            <a:off x="396000" y="540000"/>
-            <a:ext cx="2160000" cy="313692"/>
+            <a:off x="1692000" y="540000"/>
+            <a:ext cx="1368000" cy="360000"/>
           </a:xfrm>
           <a:prstGeom prst="rect">
             <a:avLst/>
@@ -3375,16 +3221,16 @@
           <a:p>
             <a:pPr algn="l">
               <a:lnSpc>
-                <a:spcPts val="2755"/>
+                <a:spcPts val="3190"/>
               </a:lnSpc>
             </a:pPr>
             <a:r>
-              <a:rPr sz="1900" b="1" spc="50">
+              <a:rPr sz="2200" b="1">
                 <a:solidFill>
-                  <a:srgbClr val="314149"/>
+                  <a:srgbClr val="12151C"/>
                 </a:solidFill>
-                <a:latin typeface="바탕"/>
-                <a:ea typeface="바탕"/>
+                <a:latin typeface="맑은 고딕"/>
+                <a:ea typeface="맑은 고딕"/>
               </a:rPr>
               <a:t>차예준</a:t>
             </a:r>
@@ -3393,14 +3239,14 @@
       </p:sp>
       <p:sp>
         <p:nvSpPr>
-          <p:cNvPr id="10" name="텍스트"/>
+          <p:cNvPr id="6" name="텍스트"/>
           <p:cNvSpPr txBox="1"/>
           <p:nvPr/>
         </p:nvSpPr>
         <p:spPr>
           <a:xfrm>
-            <a:off x="396000" y="835200"/>
-            <a:ext cx="2160000" cy="129600"/>
+            <a:off x="1692000" y="943200"/>
+            <a:ext cx="1368000" cy="171451"/>
           </a:xfrm>
           <a:prstGeom prst="rect">
             <a:avLst/>
@@ -3415,13 +3261,13 @@
           <a:p>
             <a:pPr algn="l">
               <a:lnSpc>
-                <a:spcPts val="1232"/>
+                <a:spcPts val="1305"/>
               </a:lnSpc>
             </a:pPr>
             <a:r>
-              <a:rPr sz="850" b="1">
+              <a:rPr sz="900" b="0">
                 <a:solidFill>
-                  <a:srgbClr val="7A5258"/>
+                  <a:srgbClr val="6B7280"/>
                 </a:solidFill>
                 <a:latin typeface="맑은 고딕"/>
                 <a:ea typeface="맑은 고딕"/>
@@ -3433,20 +3279,20 @@
       </p:sp>
       <p:sp>
         <p:nvSpPr>
-          <p:cNvPr id="11" name="Rectangle 10"/>
+          <p:cNvPr id="7" name="Rectangle 6"/>
           <p:cNvSpPr/>
           <p:nvPr/>
         </p:nvSpPr>
         <p:spPr>
           <a:xfrm>
-            <a:off x="396000" y="1051200"/>
-            <a:ext cx="230400" cy="14400"/>
+            <a:off x="1692000" y="1195200"/>
+            <a:ext cx="144000" cy="18000"/>
           </a:xfrm>
           <a:prstGeom prst="rect">
             <a:avLst/>
           </a:prstGeom>
           <a:solidFill>
-            <a:srgbClr val="7A5258"/>
+            <a:srgbClr val="FF9E6B"/>
           </a:solidFill>
           <a:ln>
             <a:noFill/>
@@ -3462,14 +3308,14 @@
       </p:sp>
       <p:sp>
         <p:nvSpPr>
-          <p:cNvPr id="12" name="텍스트"/>
+          <p:cNvPr id="8" name="텍스트"/>
           <p:cNvSpPr txBox="1"/>
           <p:nvPr/>
         </p:nvSpPr>
         <p:spPr>
           <a:xfrm>
-            <a:off x="396000" y="1188000"/>
-            <a:ext cx="122400" cy="168911"/>
+            <a:off x="1692000" y="1328400"/>
+            <a:ext cx="331200" cy="99061"/>
           </a:xfrm>
           <a:prstGeom prst="rect">
             <a:avLst/>
@@ -3484,32 +3330,32 @@
           <a:p>
             <a:pPr algn="l">
               <a:lnSpc>
-                <a:spcPts val="1015"/>
+                <a:spcPts val="754"/>
               </a:lnSpc>
             </a:pPr>
             <a:r>
-              <a:rPr sz="700" b="1">
+              <a:rPr sz="520" b="1" spc="120">
                 <a:solidFill>
-                  <a:srgbClr val="7A5258"/>
+                  <a:srgbClr val="6B7280"/>
                 </a:solidFill>
                 <a:latin typeface="맑은 고딕"/>
                 <a:ea typeface="맑은 고딕"/>
               </a:rPr>
-              <a:t>T</a:t>
-            </a:r>
-          </a:p>
-        </p:txBody>
-      </p:sp>
-      <p:sp>
-        <p:nvSpPr>
-          <p:cNvPr id="13" name="텍스트"/>
+              <a:t>TEL</a:t>
+            </a:r>
+          </a:p>
+        </p:txBody>
+      </p:sp>
+      <p:sp>
+        <p:nvSpPr>
+          <p:cNvPr id="9" name="텍스트"/>
           <p:cNvSpPr txBox="1"/>
           <p:nvPr/>
         </p:nvSpPr>
         <p:spPr>
           <a:xfrm>
-            <a:off x="540000" y="1188000"/>
-            <a:ext cx="1872000" cy="168911"/>
+            <a:off x="2023200" y="1317600"/>
+            <a:ext cx="1188000" cy="125731"/>
           </a:xfrm>
           <a:prstGeom prst="rect">
             <a:avLst/>
@@ -3524,13 +3370,13 @@
           <a:p>
             <a:pPr algn="l">
               <a:lnSpc>
-                <a:spcPts val="1015"/>
+                <a:spcPts val="956"/>
               </a:lnSpc>
             </a:pPr>
             <a:r>
-              <a:rPr sz="700" b="0">
+              <a:rPr sz="660" b="0">
                 <a:solidFill>
-                  <a:srgbClr val="314149"/>
+                  <a:srgbClr val="12151C"/>
                 </a:solidFill>
                 <a:latin typeface="맑은 고딕"/>
                 <a:ea typeface="맑은 고딕"/>
@@ -3542,14 +3388,14 @@
       </p:sp>
       <p:sp>
         <p:nvSpPr>
-          <p:cNvPr id="14" name="텍스트"/>
+          <p:cNvPr id="10" name="텍스트"/>
           <p:cNvSpPr txBox="1"/>
           <p:nvPr/>
         </p:nvSpPr>
         <p:spPr>
           <a:xfrm>
-            <a:off x="396000" y="1356911"/>
-            <a:ext cx="122400" cy="168911"/>
+            <a:off x="1692000" y="1458000"/>
+            <a:ext cx="331200" cy="99061"/>
           </a:xfrm>
           <a:prstGeom prst="rect">
             <a:avLst/>
@@ -3564,32 +3410,32 @@
           <a:p>
             <a:pPr algn="l">
               <a:lnSpc>
-                <a:spcPts val="1015"/>
+                <a:spcPts val="754"/>
               </a:lnSpc>
             </a:pPr>
             <a:r>
-              <a:rPr sz="700" b="1">
+              <a:rPr sz="520" b="1" spc="120">
                 <a:solidFill>
-                  <a:srgbClr val="7A5258"/>
+                  <a:srgbClr val="6B7280"/>
                 </a:solidFill>
                 <a:latin typeface="맑은 고딕"/>
                 <a:ea typeface="맑은 고딕"/>
               </a:rPr>
-              <a:t>E</a:t>
-            </a:r>
-          </a:p>
-        </p:txBody>
-      </p:sp>
-      <p:sp>
-        <p:nvSpPr>
-          <p:cNvPr id="15" name="텍스트"/>
+              <a:t>MAIL</a:t>
+            </a:r>
+          </a:p>
+        </p:txBody>
+      </p:sp>
+      <p:sp>
+        <p:nvSpPr>
+          <p:cNvPr id="11" name="텍스트"/>
           <p:cNvSpPr txBox="1"/>
           <p:nvPr/>
         </p:nvSpPr>
         <p:spPr>
           <a:xfrm>
-            <a:off x="540000" y="1356911"/>
-            <a:ext cx="1872000" cy="168911"/>
+            <a:off x="2023200" y="1447200"/>
+            <a:ext cx="1188000" cy="125731"/>
           </a:xfrm>
           <a:prstGeom prst="rect">
             <a:avLst/>
@@ -3604,13 +3450,13 @@
           <a:p>
             <a:pPr algn="l">
               <a:lnSpc>
-                <a:spcPts val="1015"/>
+                <a:spcPts val="956"/>
               </a:lnSpc>
             </a:pPr>
             <a:r>
-              <a:rPr sz="700" b="0">
+              <a:rPr sz="660" b="0">
                 <a:solidFill>
-                  <a:srgbClr val="314149"/>
+                  <a:srgbClr val="12151C"/>
                 </a:solidFill>
                 <a:latin typeface="맑은 고딕"/>
                 <a:ea typeface="맑은 고딕"/>
@@ -3622,14 +3468,14 @@
       </p:sp>
       <p:sp>
         <p:nvSpPr>
-          <p:cNvPr id="16" name="텍스트"/>
+          <p:cNvPr id="12" name="텍스트"/>
           <p:cNvSpPr txBox="1"/>
           <p:nvPr/>
         </p:nvSpPr>
         <p:spPr>
           <a:xfrm>
-            <a:off x="396000" y="1525822"/>
-            <a:ext cx="122400" cy="168911"/>
+            <a:off x="1692000" y="1587600"/>
+            <a:ext cx="331200" cy="99061"/>
           </a:xfrm>
           <a:prstGeom prst="rect">
             <a:avLst/>
@@ -3644,32 +3490,32 @@
           <a:p>
             <a:pPr algn="l">
               <a:lnSpc>
-                <a:spcPts val="1015"/>
+                <a:spcPts val="754"/>
               </a:lnSpc>
             </a:pPr>
             <a:r>
-              <a:rPr sz="700" b="1">
+              <a:rPr sz="520" b="1" spc="120">
                 <a:solidFill>
-                  <a:srgbClr val="7A5258"/>
+                  <a:srgbClr val="6B7280"/>
                 </a:solidFill>
                 <a:latin typeface="맑은 고딕"/>
                 <a:ea typeface="맑은 고딕"/>
               </a:rPr>
-              <a:t>A</a:t>
-            </a:r>
-          </a:p>
-        </p:txBody>
-      </p:sp>
-      <p:sp>
-        <p:nvSpPr>
-          <p:cNvPr id="17" name="텍스트"/>
+              <a:t>ADDR</a:t>
+            </a:r>
+          </a:p>
+        </p:txBody>
+      </p:sp>
+      <p:sp>
+        <p:nvSpPr>
+          <p:cNvPr id="13" name="텍스트"/>
           <p:cNvSpPr txBox="1"/>
           <p:nvPr/>
         </p:nvSpPr>
         <p:spPr>
           <a:xfrm>
-            <a:off x="540000" y="1525822"/>
-            <a:ext cx="1872000" cy="168911"/>
+            <a:off x="2023200" y="1576800"/>
+            <a:ext cx="1188000" cy="125731"/>
           </a:xfrm>
           <a:prstGeom prst="rect">
             <a:avLst/>
@@ -3684,13 +3530,13 @@
           <a:p>
             <a:pPr algn="l">
               <a:lnSpc>
-                <a:spcPts val="1015"/>
+                <a:spcPts val="956"/>
               </a:lnSpc>
             </a:pPr>
             <a:r>
-              <a:rPr sz="700" b="0">
+              <a:rPr sz="660" b="0">
                 <a:solidFill>
-                  <a:srgbClr val="314149"/>
+                  <a:srgbClr val="12151C"/>
                 </a:solidFill>
                 <a:latin typeface="맑은 고딕"/>
                 <a:ea typeface="맑은 고딕"/>
@@ -3714,7 +3560,7 @@
     <p:bg>
       <p:bgPr>
         <a:solidFill>
-          <a:srgbClr val="FBF8F2"/>
+          <a:srgbClr val="F3F4F6"/>
         </a:solidFill>
         <a:effectLst/>
       </p:bgPr>
@@ -3728,74 +3574,20 @@
       <p:grpSpPr/>
       <p:sp>
         <p:nvSpPr>
-          <p:cNvPr id="2" name="Freeform 1"/>
+          <p:cNvPr id="2" name="Rectangle 1"/>
           <p:cNvSpPr/>
           <p:nvPr/>
         </p:nvSpPr>
         <p:spPr>
           <a:xfrm>
-            <a:off x="986400" y="900000"/>
-            <a:ext cx="1267200" cy="538560"/>
+            <a:off x="2088000" y="0"/>
+            <a:ext cx="1152000" cy="1800000"/>
           </a:xfrm>
-          <a:custGeom>
+          <a:prstGeom prst="rect">
             <a:avLst/>
-            <a:gdLst/>
-            <a:ahLst/>
-            <a:cxnLst/>
-            <a:rect l="l" t="t" r="r" b="b"/>
-            <a:pathLst>
-              <a:path w="1267200" h="538560">
-                <a:moveTo>
-                  <a:pt x="1267200" y="0"/>
-                </a:moveTo>
-                <a:lnTo>
-                  <a:pt x="1251314" y="119841"/>
-                </a:lnTo>
-                <a:lnTo>
-                  <a:pt x="1204454" y="233672"/>
-                </a:lnTo>
-                <a:lnTo>
-                  <a:pt x="1128968" y="335787"/>
-                </a:lnTo>
-                <a:lnTo>
-                  <a:pt x="1028643" y="421063"/>
-                </a:lnTo>
-                <a:lnTo>
-                  <a:pt x="908509" y="485226"/>
-                </a:lnTo>
-                <a:lnTo>
-                  <a:pt x="774589" y="525057"/>
-                </a:lnTo>
-                <a:lnTo>
-                  <a:pt x="633600" y="538560"/>
-                </a:lnTo>
-                <a:lnTo>
-                  <a:pt x="492611" y="525057"/>
-                </a:lnTo>
-                <a:lnTo>
-                  <a:pt x="358691" y="485226"/>
-                </a:lnTo>
-                <a:lnTo>
-                  <a:pt x="238557" y="421063"/>
-                </a:lnTo>
-                <a:lnTo>
-                  <a:pt x="138232" y="335787"/>
-                </a:lnTo>
-                <a:lnTo>
-                  <a:pt x="62746" y="233672"/>
-                </a:lnTo>
-                <a:lnTo>
-                  <a:pt x="15886" y="119841"/>
-                </a:lnTo>
-                <a:lnTo>
-                  <a:pt x="0" y="0"/>
-                </a:lnTo>
-                <a:close/>
-              </a:path>
-            </a:pathLst>
-          </a:custGeom>
+          </a:prstGeom>
           <a:solidFill>
-            <a:srgbClr val="7A5258"/>
+            <a:srgbClr val="FF9E6B"/>
           </a:solidFill>
           <a:ln>
             <a:noFill/>
@@ -3811,118 +3603,43 @@
       </p:sp>
       <p:sp>
         <p:nvSpPr>
-          <p:cNvPr id="3" name="Rounded Rectangle 2"/>
+          <p:cNvPr id="3" name="Oval 2"/>
           <p:cNvSpPr/>
           <p:nvPr/>
         </p:nvSpPr>
         <p:spPr>
           <a:xfrm>
-            <a:off x="1208160" y="1422720"/>
-            <a:ext cx="823680" cy="110880"/>
+            <a:off x="2397600" y="633600"/>
+            <a:ext cx="532800" cy="532800"/>
           </a:xfrm>
-          <a:prstGeom prst="roundRect">
-            <a:avLst>
-              <a:gd name="adj" fmla="val 42857"/>
-            </a:avLst>
-          </a:prstGeom>
-          <a:solidFill>
-            <a:srgbClr val="DACFD0"/>
-          </a:solidFill>
-          <a:ln>
-            <a:noFill/>
-          </a:ln>
-        </p:spPr>
-        <p:txBody>
-          <a:bodyPr rtlCol="0" anchor="ctr"/>
-          <a:lstStyle/>
-          <a:p>
-            <a:pPr algn="ctr"/>
-          </a:p>
-        </p:txBody>
-      </p:sp>
-      <p:cxnSp>
-        <p:nvCxnSpPr>
-          <p:cNvPr id="4" name="Connector 3"/>
-          <p:cNvCxnSpPr/>
-          <p:nvPr/>
-        </p:nvCxnSpPr>
-        <p:spPr>
-          <a:xfrm>
-            <a:off x="1524960" y="361440"/>
-            <a:ext cx="570240" cy="475200"/>
-          </a:xfrm>
-          <a:prstGeom prst="line">
+          <a:prstGeom prst="ellipse">
             <a:avLst/>
           </a:prstGeom>
-          <a:ln w="79200">
+          <a:noFill/>
+          <a:ln w="10800">
             <a:solidFill>
-              <a:srgbClr val="DACFD0"/>
+              <a:srgbClr val="12151C"/>
             </a:solidFill>
           </a:ln>
         </p:spPr>
-      </p:cxnSp>
-      <p:cxnSp>
-        <p:nvCxnSpPr>
-          <p:cNvPr id="5" name="Connector 4"/>
-          <p:cNvCxnSpPr/>
+        <p:txBody>
+          <a:bodyPr rtlCol="0" anchor="ctr"/>
+          <a:lstStyle/>
+          <a:p>
+            <a:pPr algn="ctr"/>
+          </a:p>
+        </p:txBody>
+      </p:sp>
+      <p:sp>
+        <p:nvSpPr>
+          <p:cNvPr id="4" name="텍스트"/>
+          <p:cNvSpPr txBox="1"/>
           <p:nvPr/>
-        </p:nvCxnSpPr>
+        </p:nvSpPr>
         <p:spPr>
           <a:xfrm>
-            <a:off x="1715040" y="361440"/>
-            <a:ext cx="538560" cy="411840"/>
-          </a:xfrm>
-          <a:prstGeom prst="line">
-            <a:avLst/>
-          </a:prstGeom>
-          <a:ln w="79200">
-            <a:solidFill>
-              <a:srgbClr val="DACFD0"/>
-            </a:solidFill>
-          </a:ln>
-        </p:spPr>
-      </p:cxnSp>
-      <p:sp>
-        <p:nvSpPr>
-          <p:cNvPr id="6" name="Rectangle 5"/>
-          <p:cNvSpPr/>
-          <p:nvPr/>
-        </p:nvSpPr>
-        <p:spPr>
-          <a:xfrm>
-            <a:off x="0" y="0"/>
-            <a:ext cx="3240000" cy="1800000"/>
-          </a:xfrm>
-          <a:prstGeom prst="rect">
-            <a:avLst/>
-          </a:prstGeom>
-          <a:solidFill>
-            <a:srgbClr val="FBF8F2">
-              <a:alpha val="90000"/>
-            </a:srgbClr>
-          </a:solidFill>
-          <a:ln>
-            <a:noFill/>
-          </a:ln>
-        </p:spPr>
-        <p:txBody>
-          <a:bodyPr rtlCol="0" anchor="ctr"/>
-          <a:lstStyle/>
-          <a:p>
-            <a:pPr algn="ctr"/>
-          </a:p>
-        </p:txBody>
-      </p:sp>
-      <p:sp>
-        <p:nvSpPr>
-          <p:cNvPr id="7" name="텍스트"/>
-          <p:cNvSpPr txBox="1"/>
-          <p:nvPr/>
-        </p:nvSpPr>
-        <p:spPr>
-          <a:xfrm>
-            <a:off x="396000" y="612000"/>
-            <a:ext cx="2448000" cy="432000"/>
+            <a:off x="2304000" y="684000"/>
+            <a:ext cx="720000" cy="432000"/>
           </a:xfrm>
           <a:prstGeom prst="rect">
             <a:avLst/>
@@ -3937,61 +3654,32 @@
           <a:p>
             <a:pPr algn="ctr">
               <a:lnSpc>
-                <a:spcPts val="1739"/>
+                <a:spcPts val="4350"/>
               </a:lnSpc>
             </a:pPr>
             <a:r>
-              <a:rPr sz="1200" b="1">
+              <a:rPr sz="3000" b="1">
                 <a:solidFill>
-                  <a:srgbClr val="314149"/>
+                  <a:srgbClr val="12151C"/>
                 </a:solidFill>
                 <a:latin typeface="맑은 고딕"/>
                 <a:ea typeface="맑은 고딕"/>
               </a:rPr>
-              <a:t>향긋한 커피와 다정한 인사</a:t>
-            </a:r>
-          </a:p>
-        </p:txBody>
-      </p:sp>
-      <p:sp>
-        <p:nvSpPr>
-          <p:cNvPr id="8" name="Rectangle 7"/>
-          <p:cNvSpPr/>
+              <a:t>상</a:t>
+            </a:r>
+          </a:p>
+        </p:txBody>
+      </p:sp>
+      <p:sp>
+        <p:nvSpPr>
+          <p:cNvPr id="5" name="텍스트"/>
+          <p:cNvSpPr txBox="1"/>
           <p:nvPr/>
         </p:nvSpPr>
         <p:spPr>
           <a:xfrm>
-            <a:off x="1512000" y="1173600"/>
-            <a:ext cx="216000" cy="10800"/>
-          </a:xfrm>
-          <a:prstGeom prst="rect">
-            <a:avLst/>
-          </a:prstGeom>
-          <a:solidFill>
-            <a:srgbClr val="7A5258"/>
-          </a:solidFill>
-          <a:ln>
-            <a:noFill/>
-          </a:ln>
-        </p:spPr>
-        <p:txBody>
-          <a:bodyPr rtlCol="0" anchor="ctr"/>
-          <a:lstStyle/>
-          <a:p>
-            <a:pPr algn="ctr"/>
-          </a:p>
-        </p:txBody>
-      </p:sp>
-      <p:sp>
-        <p:nvSpPr>
-          <p:cNvPr id="9" name="텍스트"/>
-          <p:cNvSpPr txBox="1"/>
-          <p:nvPr/>
-        </p:nvSpPr>
-        <p:spPr>
-          <a:xfrm>
-            <a:off x="360000" y="1288800"/>
-            <a:ext cx="2520000" cy="108000"/>
+            <a:off x="252000" y="540000"/>
+            <a:ext cx="1620000" cy="720000"/>
           </a:xfrm>
           <a:prstGeom prst="rect">
             <a:avLst/>
@@ -4004,15 +3692,72 @@
           </a:bodyPr>
           <a:lstStyle/>
           <a:p>
-            <a:pPr algn="ctr">
+            <a:pPr algn="l">
               <a:lnSpc>
-                <a:spcPts val="1087"/>
+                <a:spcPts val="1739"/>
               </a:lnSpc>
             </a:pPr>
             <a:r>
-              <a:rPr sz="750" b="1" spc="300">
+              <a:rPr sz="1200" b="1">
                 <a:solidFill>
-                  <a:srgbClr val="6C7477"/>
+                  <a:srgbClr val="12151C"/>
+                </a:solidFill>
+                <a:latin typeface="맑은 고딕"/>
+                <a:ea typeface="맑은 고딕"/>
+              </a:rPr>
+              <a:t>향긋한 커피와</a:t>
+            </a:r>
+          </a:p>
+          <a:p>
+            <a:pPr algn="l">
+              <a:lnSpc>
+                <a:spcPts val="1739"/>
+              </a:lnSpc>
+            </a:pPr>
+            <a:r>
+              <a:rPr sz="1200" b="1">
+                <a:solidFill>
+                  <a:srgbClr val="12151C"/>
+                </a:solidFill>
+                <a:latin typeface="맑은 고딕"/>
+                <a:ea typeface="맑은 고딕"/>
+              </a:rPr>
+              <a:t>다정한 인사</a:t>
+            </a:r>
+          </a:p>
+        </p:txBody>
+      </p:sp>
+      <p:sp>
+        <p:nvSpPr>
+          <p:cNvPr id="6" name="텍스트"/>
+          <p:cNvSpPr txBox="1"/>
+          <p:nvPr/>
+        </p:nvSpPr>
+        <p:spPr>
+          <a:xfrm>
+            <a:off x="252000" y="1512000"/>
+            <a:ext cx="1584000" cy="123826"/>
+          </a:xfrm>
+          <a:prstGeom prst="rect">
+            <a:avLst/>
+          </a:prstGeom>
+          <a:noFill/>
+        </p:spPr>
+        <p:txBody>
+          <a:bodyPr wrap="square" lIns="0" rIns="0" tIns="0" bIns="0" anchor="t">
+            <a:spAutoFit/>
+          </a:bodyPr>
+          <a:lstStyle/>
+          <a:p>
+            <a:pPr algn="l">
+              <a:lnSpc>
+                <a:spcPts val="942"/>
+              </a:lnSpc>
+            </a:pPr>
+            <a:r>
+              <a:rPr sz="650" b="1" spc="200">
+                <a:solidFill>
+                  <a:srgbClr val="6B7280"/>
                 </a:solidFill>
                 <a:latin typeface="맑은 고딕"/>
                 <a:ea typeface="맑은 고딕"/>

--- a/public/fun/cards/food/food-31.pptx
+++ b/public/fun/cards/food/food-31.pptx
@@ -3097,22 +3097,43 @@
         <p:nvPr/>
       </p:nvGrpSpPr>
       <p:grpSpPr/>
-      <p:sp>
-        <p:nvSpPr>
-          <p:cNvPr id="2" name="Oval 1"/>
+      <p:cxnSp>
+        <p:nvCxnSpPr>
+          <p:cNvPr id="2" name="Connector 1"/>
+          <p:cNvCxnSpPr/>
+          <p:nvPr/>
+        </p:nvCxnSpPr>
+        <p:spPr>
+          <a:xfrm>
+            <a:off x="1080000" y="252000"/>
+            <a:ext cx="0" cy="1296000"/>
+          </a:xfrm>
+          <a:prstGeom prst="line">
+            <a:avLst/>
+          </a:prstGeom>
+          <a:ln w="3600">
+            <a:solidFill>
+              <a:srgbClr val="DCDFE4"/>
+            </a:solidFill>
+          </a:ln>
+        </p:spPr>
+      </p:cxnSp>
+      <p:sp>
+        <p:nvSpPr>
+          <p:cNvPr id="3" name="Rectangle 2"/>
           <p:cNvSpPr/>
           <p:nvPr/>
         </p:nvSpPr>
         <p:spPr>
           <a:xfrm>
-            <a:off x="547200" y="475200"/>
-            <a:ext cx="849600" cy="849600"/>
-          </a:xfrm>
-          <a:prstGeom prst="ellipse">
+            <a:off x="1069200" y="252000"/>
+            <a:ext cx="21600" cy="201600"/>
+          </a:xfrm>
+          <a:prstGeom prst="rect">
             <a:avLst/>
           </a:prstGeom>
           <a:solidFill>
-            <a:srgbClr val="F5E8E3"/>
+            <a:srgbClr val="FF9E6B"/>
           </a:solidFill>
           <a:ln>
             <a:noFill/>
@@ -3128,45 +3149,14 @@
       </p:sp>
       <p:sp>
         <p:nvSpPr>
-          <p:cNvPr id="3" name="Oval 2"/>
-          <p:cNvSpPr/>
-          <p:nvPr/>
-        </p:nvSpPr>
-        <p:spPr>
-          <a:xfrm>
-            <a:off x="187200" y="475200"/>
-            <a:ext cx="849600" cy="849600"/>
-          </a:xfrm>
-          <a:prstGeom prst="ellipse">
-            <a:avLst/>
-          </a:prstGeom>
-          <a:solidFill>
-            <a:srgbClr val="FF9E6B">
-              <a:alpha val="92000"/>
-            </a:srgbClr>
-          </a:solidFill>
-          <a:ln>
-            <a:noFill/>
-          </a:ln>
-        </p:spPr>
-        <p:txBody>
-          <a:bodyPr rtlCol="0" anchor="ctr"/>
-          <a:lstStyle/>
-          <a:p>
-            <a:pPr algn="ctr"/>
-          </a:p>
-        </p:txBody>
-      </p:sp>
-      <p:sp>
-        <p:nvSpPr>
           <p:cNvPr id="4" name="텍스트"/>
           <p:cNvSpPr txBox="1"/>
           <p:nvPr/>
         </p:nvSpPr>
         <p:spPr>
           <a:xfrm>
-            <a:off x="1692000" y="223200"/>
-            <a:ext cx="1296000" cy="133351"/>
+            <a:off x="252000" y="252000"/>
+            <a:ext cx="756000" cy="123826"/>
           </a:xfrm>
           <a:prstGeom prst="rect">
             <a:avLst/>
@@ -3181,11 +3171,11 @@
           <a:p>
             <a:pPr algn="l">
               <a:lnSpc>
-                <a:spcPts val="1015"/>
+                <a:spcPts val="942"/>
               </a:lnSpc>
             </a:pPr>
             <a:r>
-              <a:rPr sz="700" b="1" spc="200">
+              <a:rPr sz="650" b="1" spc="220">
                 <a:solidFill>
                   <a:srgbClr val="6B7280"/>
                 </a:solidFill>
@@ -3199,14 +3189,83 @@
       </p:sp>
       <p:sp>
         <p:nvSpPr>
-          <p:cNvPr id="5" name="텍스트"/>
+          <p:cNvPr id="5" name="Oval 4"/>
+          <p:cNvSpPr/>
+          <p:nvPr/>
+        </p:nvSpPr>
+        <p:spPr>
+          <a:xfrm>
+            <a:off x="273600" y="734400"/>
+            <a:ext cx="244800" cy="244800"/>
+          </a:xfrm>
+          <a:prstGeom prst="ellipse">
+            <a:avLst/>
+          </a:prstGeom>
+          <a:noFill/>
+          <a:ln w="5040">
+            <a:solidFill>
+              <a:srgbClr val="FF9E6B"/>
+            </a:solidFill>
+          </a:ln>
+        </p:spPr>
+        <p:txBody>
+          <a:bodyPr rtlCol="0" anchor="ctr"/>
+          <a:lstStyle/>
+          <a:p>
+            <a:pPr algn="ctr"/>
+          </a:p>
+        </p:txBody>
+      </p:sp>
+      <p:sp>
+        <p:nvSpPr>
+          <p:cNvPr id="6" name="텍스트"/>
           <p:cNvSpPr txBox="1"/>
           <p:nvPr/>
         </p:nvSpPr>
         <p:spPr>
           <a:xfrm>
-            <a:off x="1692000" y="540000"/>
-            <a:ext cx="1368000" cy="360000"/>
+            <a:off x="252000" y="734400"/>
+            <a:ext cx="288000" cy="252000"/>
+          </a:xfrm>
+          <a:prstGeom prst="rect">
+            <a:avLst/>
+          </a:prstGeom>
+          <a:noFill/>
+        </p:spPr>
+        <p:txBody>
+          <a:bodyPr wrap="square" lIns="0" rIns="0" tIns="0" bIns="0" anchor="ctr">
+            <a:spAutoFit/>
+          </a:bodyPr>
+          <a:lstStyle/>
+          <a:p>
+            <a:pPr algn="ctr">
+              <a:lnSpc>
+                <a:spcPts val="1305"/>
+              </a:lnSpc>
+            </a:pPr>
+            <a:r>
+              <a:rPr sz="900" b="1">
+                <a:solidFill>
+                  <a:srgbClr val="FF9E6B"/>
+                </a:solidFill>
+                <a:latin typeface="맑은 고딕"/>
+                <a:ea typeface="맑은 고딕"/>
+              </a:rPr>
+              <a:t>상</a:t>
+            </a:r>
+          </a:p>
+        </p:txBody>
+      </p:sp>
+      <p:sp>
+        <p:nvSpPr>
+          <p:cNvPr id="7" name="텍스트"/>
+          <p:cNvSpPr txBox="1"/>
+          <p:nvPr/>
+        </p:nvSpPr>
+        <p:spPr>
+          <a:xfrm>
+            <a:off x="1260000" y="432000"/>
+            <a:ext cx="1800000" cy="237600"/>
           </a:xfrm>
           <a:prstGeom prst="rect">
             <a:avLst/>
@@ -3221,11 +3280,11 @@
           <a:p>
             <a:pPr algn="l">
               <a:lnSpc>
-                <a:spcPts val="3190"/>
+                <a:spcPts val="1957"/>
               </a:lnSpc>
             </a:pPr>
             <a:r>
-              <a:rPr sz="2200" b="1">
+              <a:rPr sz="1350" b="1" spc="120">
                 <a:solidFill>
                   <a:srgbClr val="12151C"/>
                 </a:solidFill>
@@ -3239,14 +3298,14 @@
       </p:sp>
       <p:sp>
         <p:nvSpPr>
-          <p:cNvPr id="6" name="텍스트"/>
+          <p:cNvPr id="8" name="텍스트"/>
           <p:cNvSpPr txBox="1"/>
           <p:nvPr/>
         </p:nvSpPr>
         <p:spPr>
           <a:xfrm>
-            <a:off x="1692000" y="943200"/>
-            <a:ext cx="1368000" cy="171451"/>
+            <a:off x="1260000" y="684000"/>
+            <a:ext cx="1800000" cy="133351"/>
           </a:xfrm>
           <a:prstGeom prst="rect">
             <a:avLst/>
@@ -3261,11 +3320,11 @@
           <a:p>
             <a:pPr algn="l">
               <a:lnSpc>
-                <a:spcPts val="1305"/>
+                <a:spcPts val="1015"/>
               </a:lnSpc>
             </a:pPr>
             <a:r>
-              <a:rPr sz="900" b="0">
+              <a:rPr sz="700" b="0" spc="60">
                 <a:solidFill>
                   <a:srgbClr val="6B7280"/>
                 </a:solidFill>
@@ -3277,45 +3336,37 @@
           </a:p>
         </p:txBody>
       </p:sp>
-      <p:sp>
-        <p:nvSpPr>
-          <p:cNvPr id="7" name="Rectangle 6"/>
-          <p:cNvSpPr/>
-          <p:nvPr/>
-        </p:nvSpPr>
+      <p:cxnSp>
+        <p:nvCxnSpPr>
+          <p:cNvPr id="9" name="Connector 8"/>
+          <p:cNvCxnSpPr/>
+          <p:nvPr/>
+        </p:nvCxnSpPr>
         <p:spPr>
           <a:xfrm>
-            <a:off x="1692000" y="1195200"/>
-            <a:ext cx="144000" cy="18000"/>
-          </a:xfrm>
-          <a:prstGeom prst="rect">
-            <a:avLst/>
-          </a:prstGeom>
-          <a:solidFill>
-            <a:srgbClr val="FF9E6B"/>
-          </a:solidFill>
-          <a:ln>
-            <a:noFill/>
+            <a:off x="1260000" y="943200"/>
+            <a:ext cx="1728000" cy="0"/>
+          </a:xfrm>
+          <a:prstGeom prst="line">
+            <a:avLst/>
+          </a:prstGeom>
+          <a:ln w="3600">
+            <a:solidFill>
+              <a:srgbClr val="DCDFE4"/>
+            </a:solidFill>
           </a:ln>
         </p:spPr>
-        <p:txBody>
-          <a:bodyPr rtlCol="0" anchor="ctr"/>
-          <a:lstStyle/>
-          <a:p>
-            <a:pPr algn="ctr"/>
-          </a:p>
-        </p:txBody>
-      </p:sp>
-      <p:sp>
-        <p:nvSpPr>
-          <p:cNvPr id="8" name="텍스트"/>
+      </p:cxnSp>
+      <p:sp>
+        <p:nvSpPr>
+          <p:cNvPr id="10" name="텍스트"/>
           <p:cNvSpPr txBox="1"/>
           <p:nvPr/>
         </p:nvSpPr>
         <p:spPr>
           <a:xfrm>
-            <a:off x="1692000" y="1328400"/>
-            <a:ext cx="331200" cy="99061"/>
+            <a:off x="1260000" y="1054800"/>
+            <a:ext cx="331200" cy="91441"/>
           </a:xfrm>
           <a:prstGeom prst="rect">
             <a:avLst/>
@@ -3330,11 +3381,11 @@
           <a:p>
             <a:pPr algn="l">
               <a:lnSpc>
-                <a:spcPts val="754"/>
+                <a:spcPts val="696"/>
               </a:lnSpc>
             </a:pPr>
             <a:r>
-              <a:rPr sz="520" b="1" spc="120">
+              <a:rPr sz="480" b="1" spc="140">
                 <a:solidFill>
                   <a:srgbClr val="6B7280"/>
                 </a:solidFill>
@@ -3348,14 +3399,14 @@
       </p:sp>
       <p:sp>
         <p:nvSpPr>
-          <p:cNvPr id="9" name="텍스트"/>
+          <p:cNvPr id="11" name="텍스트"/>
           <p:cNvSpPr txBox="1"/>
           <p:nvPr/>
         </p:nvSpPr>
         <p:spPr>
           <a:xfrm>
-            <a:off x="2023200" y="1317600"/>
-            <a:ext cx="1188000" cy="125731"/>
+            <a:off x="1591200" y="1044000"/>
+            <a:ext cx="1188000" cy="123826"/>
           </a:xfrm>
           <a:prstGeom prst="rect">
             <a:avLst/>
@@ -3370,11 +3421,11 @@
           <a:p>
             <a:pPr algn="l">
               <a:lnSpc>
-                <a:spcPts val="956"/>
+                <a:spcPts val="942"/>
               </a:lnSpc>
             </a:pPr>
             <a:r>
-              <a:rPr sz="660" b="0">
+              <a:rPr sz="650" b="0">
                 <a:solidFill>
                   <a:srgbClr val="12151C"/>
                 </a:solidFill>
@@ -3388,14 +3439,14 @@
       </p:sp>
       <p:sp>
         <p:nvSpPr>
-          <p:cNvPr id="10" name="텍스트"/>
+          <p:cNvPr id="12" name="텍스트"/>
           <p:cNvSpPr txBox="1"/>
           <p:nvPr/>
         </p:nvSpPr>
         <p:spPr>
           <a:xfrm>
-            <a:off x="1692000" y="1458000"/>
-            <a:ext cx="331200" cy="99061"/>
+            <a:off x="1260000" y="1184400"/>
+            <a:ext cx="331200" cy="91441"/>
           </a:xfrm>
           <a:prstGeom prst="rect">
             <a:avLst/>
@@ -3410,11 +3461,11 @@
           <a:p>
             <a:pPr algn="l">
               <a:lnSpc>
-                <a:spcPts val="754"/>
+                <a:spcPts val="696"/>
               </a:lnSpc>
             </a:pPr>
             <a:r>
-              <a:rPr sz="520" b="1" spc="120">
+              <a:rPr sz="480" b="1" spc="140">
                 <a:solidFill>
                   <a:srgbClr val="6B7280"/>
                 </a:solidFill>
@@ -3428,14 +3479,14 @@
       </p:sp>
       <p:sp>
         <p:nvSpPr>
-          <p:cNvPr id="11" name="텍스트"/>
+          <p:cNvPr id="13" name="텍스트"/>
           <p:cNvSpPr txBox="1"/>
           <p:nvPr/>
         </p:nvSpPr>
         <p:spPr>
           <a:xfrm>
-            <a:off x="2023200" y="1447200"/>
-            <a:ext cx="1188000" cy="125731"/>
+            <a:off x="1591200" y="1173600"/>
+            <a:ext cx="1188000" cy="123826"/>
           </a:xfrm>
           <a:prstGeom prst="rect">
             <a:avLst/>
@@ -3450,11 +3501,11 @@
           <a:p>
             <a:pPr algn="l">
               <a:lnSpc>
-                <a:spcPts val="956"/>
+                <a:spcPts val="942"/>
               </a:lnSpc>
             </a:pPr>
             <a:r>
-              <a:rPr sz="660" b="0">
+              <a:rPr sz="650" b="0">
                 <a:solidFill>
                   <a:srgbClr val="12151C"/>
                 </a:solidFill>
@@ -3468,14 +3519,14 @@
       </p:sp>
       <p:sp>
         <p:nvSpPr>
-          <p:cNvPr id="12" name="텍스트"/>
+          <p:cNvPr id="14" name="텍스트"/>
           <p:cNvSpPr txBox="1"/>
           <p:nvPr/>
         </p:nvSpPr>
         <p:spPr>
           <a:xfrm>
-            <a:off x="1692000" y="1587600"/>
-            <a:ext cx="331200" cy="99061"/>
+            <a:off x="1260000" y="1314000"/>
+            <a:ext cx="331200" cy="91441"/>
           </a:xfrm>
           <a:prstGeom prst="rect">
             <a:avLst/>
@@ -3490,11 +3541,11 @@
           <a:p>
             <a:pPr algn="l">
               <a:lnSpc>
-                <a:spcPts val="754"/>
+                <a:spcPts val="696"/>
               </a:lnSpc>
             </a:pPr>
             <a:r>
-              <a:rPr sz="520" b="1" spc="120">
+              <a:rPr sz="480" b="1" spc="140">
                 <a:solidFill>
                   <a:srgbClr val="6B7280"/>
                 </a:solidFill>
@@ -3508,14 +3559,14 @@
       </p:sp>
       <p:sp>
         <p:nvSpPr>
-          <p:cNvPr id="13" name="텍스트"/>
+          <p:cNvPr id="15" name="텍스트"/>
           <p:cNvSpPr txBox="1"/>
           <p:nvPr/>
         </p:nvSpPr>
         <p:spPr>
           <a:xfrm>
-            <a:off x="2023200" y="1576800"/>
-            <a:ext cx="1188000" cy="125731"/>
+            <a:off x="1591200" y="1303200"/>
+            <a:ext cx="1188000" cy="123826"/>
           </a:xfrm>
           <a:prstGeom prst="rect">
             <a:avLst/>
@@ -3530,11 +3581,11 @@
           <a:p>
             <a:pPr algn="l">
               <a:lnSpc>
-                <a:spcPts val="956"/>
+                <a:spcPts val="942"/>
               </a:lnSpc>
             </a:pPr>
             <a:r>
-              <a:rPr sz="660" b="0">
+              <a:rPr sz="650" b="0">
                 <a:solidFill>
                   <a:srgbClr val="12151C"/>
                 </a:solidFill>
@@ -3580,8 +3631,8 @@
         </p:nvSpPr>
         <p:spPr>
           <a:xfrm>
-            <a:off x="2088000" y="0"/>
-            <a:ext cx="1152000" cy="1800000"/>
+            <a:off x="0" y="0"/>
+            <a:ext cx="1188000" cy="1800000"/>
           </a:xfrm>
           <a:prstGeom prst="rect">
             <a:avLst/>
@@ -3601,27 +3652,657 @@
           </a:p>
         </p:txBody>
       </p:sp>
-      <p:sp>
-        <p:nvSpPr>
-          <p:cNvPr id="3" name="Oval 2"/>
-          <p:cNvSpPr/>
-          <p:nvPr/>
-        </p:nvSpPr>
-        <p:spPr>
-          <a:xfrm>
-            <a:off x="2397600" y="633600"/>
-            <a:ext cx="532800" cy="532800"/>
-          </a:xfrm>
-          <a:prstGeom prst="ellipse">
-            <a:avLst/>
-          </a:prstGeom>
-          <a:noFill/>
-          <a:ln w="10800">
+      <p:cxnSp>
+        <p:nvCxnSpPr>
+          <p:cNvPr id="3" name="Connector 2"/>
+          <p:cNvCxnSpPr/>
+          <p:nvPr/>
+        </p:nvCxnSpPr>
+        <p:spPr>
+          <a:xfrm flipV="1">
+            <a:off x="0" y="1224000"/>
+            <a:ext cx="57600" cy="57600"/>
+          </a:xfrm>
+          <a:prstGeom prst="line">
+            <a:avLst/>
+          </a:prstGeom>
+          <a:ln w="3600">
             <a:solidFill>
               <a:srgbClr val="12151C"/>
             </a:solidFill>
           </a:ln>
         </p:spPr>
+      </p:cxnSp>
+      <p:cxnSp>
+        <p:nvCxnSpPr>
+          <p:cNvPr id="4" name="Connector 3"/>
+          <p:cNvCxnSpPr/>
+          <p:nvPr/>
+        </p:nvCxnSpPr>
+        <p:spPr>
+          <a:xfrm flipV="1">
+            <a:off x="0" y="1224000"/>
+            <a:ext cx="115200" cy="115200"/>
+          </a:xfrm>
+          <a:prstGeom prst="line">
+            <a:avLst/>
+          </a:prstGeom>
+          <a:ln w="3600">
+            <a:solidFill>
+              <a:srgbClr val="12151C"/>
+            </a:solidFill>
+          </a:ln>
+        </p:spPr>
+      </p:cxnSp>
+      <p:cxnSp>
+        <p:nvCxnSpPr>
+          <p:cNvPr id="5" name="Connector 4"/>
+          <p:cNvCxnSpPr/>
+          <p:nvPr/>
+        </p:nvCxnSpPr>
+        <p:spPr>
+          <a:xfrm flipV="1">
+            <a:off x="0" y="1224000"/>
+            <a:ext cx="172800" cy="172800"/>
+          </a:xfrm>
+          <a:prstGeom prst="line">
+            <a:avLst/>
+          </a:prstGeom>
+          <a:ln w="3600">
+            <a:solidFill>
+              <a:srgbClr val="12151C"/>
+            </a:solidFill>
+          </a:ln>
+        </p:spPr>
+      </p:cxnSp>
+      <p:cxnSp>
+        <p:nvCxnSpPr>
+          <p:cNvPr id="6" name="Connector 5"/>
+          <p:cNvCxnSpPr/>
+          <p:nvPr/>
+        </p:nvCxnSpPr>
+        <p:spPr>
+          <a:xfrm flipV="1">
+            <a:off x="0" y="1224000"/>
+            <a:ext cx="230400" cy="230400"/>
+          </a:xfrm>
+          <a:prstGeom prst="line">
+            <a:avLst/>
+          </a:prstGeom>
+          <a:ln w="3600">
+            <a:solidFill>
+              <a:srgbClr val="12151C"/>
+            </a:solidFill>
+          </a:ln>
+        </p:spPr>
+      </p:cxnSp>
+      <p:cxnSp>
+        <p:nvCxnSpPr>
+          <p:cNvPr id="7" name="Connector 6"/>
+          <p:cNvCxnSpPr/>
+          <p:nvPr/>
+        </p:nvCxnSpPr>
+        <p:spPr>
+          <a:xfrm flipV="1">
+            <a:off x="0" y="1224000"/>
+            <a:ext cx="288000" cy="288000"/>
+          </a:xfrm>
+          <a:prstGeom prst="line">
+            <a:avLst/>
+          </a:prstGeom>
+          <a:ln w="3600">
+            <a:solidFill>
+              <a:srgbClr val="12151C"/>
+            </a:solidFill>
+          </a:ln>
+        </p:spPr>
+      </p:cxnSp>
+      <p:cxnSp>
+        <p:nvCxnSpPr>
+          <p:cNvPr id="8" name="Connector 7"/>
+          <p:cNvCxnSpPr/>
+          <p:nvPr/>
+        </p:nvCxnSpPr>
+        <p:spPr>
+          <a:xfrm flipV="1">
+            <a:off x="0" y="1224000"/>
+            <a:ext cx="345600" cy="345600"/>
+          </a:xfrm>
+          <a:prstGeom prst="line">
+            <a:avLst/>
+          </a:prstGeom>
+          <a:ln w="3600">
+            <a:solidFill>
+              <a:srgbClr val="12151C"/>
+            </a:solidFill>
+          </a:ln>
+        </p:spPr>
+      </p:cxnSp>
+      <p:cxnSp>
+        <p:nvCxnSpPr>
+          <p:cNvPr id="9" name="Connector 8"/>
+          <p:cNvCxnSpPr/>
+          <p:nvPr/>
+        </p:nvCxnSpPr>
+        <p:spPr>
+          <a:xfrm flipV="1">
+            <a:off x="0" y="1224000"/>
+            <a:ext cx="403200" cy="403200"/>
+          </a:xfrm>
+          <a:prstGeom prst="line">
+            <a:avLst/>
+          </a:prstGeom>
+          <a:ln w="3600">
+            <a:solidFill>
+              <a:srgbClr val="12151C"/>
+            </a:solidFill>
+          </a:ln>
+        </p:spPr>
+      </p:cxnSp>
+      <p:cxnSp>
+        <p:nvCxnSpPr>
+          <p:cNvPr id="10" name="Connector 9"/>
+          <p:cNvCxnSpPr/>
+          <p:nvPr/>
+        </p:nvCxnSpPr>
+        <p:spPr>
+          <a:xfrm flipV="1">
+            <a:off x="0" y="1224000"/>
+            <a:ext cx="460800" cy="460800"/>
+          </a:xfrm>
+          <a:prstGeom prst="line">
+            <a:avLst/>
+          </a:prstGeom>
+          <a:ln w="3600">
+            <a:solidFill>
+              <a:srgbClr val="12151C"/>
+            </a:solidFill>
+          </a:ln>
+        </p:spPr>
+      </p:cxnSp>
+      <p:cxnSp>
+        <p:nvCxnSpPr>
+          <p:cNvPr id="11" name="Connector 10"/>
+          <p:cNvCxnSpPr/>
+          <p:nvPr/>
+        </p:nvCxnSpPr>
+        <p:spPr>
+          <a:xfrm flipV="1">
+            <a:off x="0" y="1224000"/>
+            <a:ext cx="518400" cy="518400"/>
+          </a:xfrm>
+          <a:prstGeom prst="line">
+            <a:avLst/>
+          </a:prstGeom>
+          <a:ln w="3600">
+            <a:solidFill>
+              <a:srgbClr val="12151C"/>
+            </a:solidFill>
+          </a:ln>
+        </p:spPr>
+      </p:cxnSp>
+      <p:cxnSp>
+        <p:nvCxnSpPr>
+          <p:cNvPr id="12" name="Connector 11"/>
+          <p:cNvCxnSpPr/>
+          <p:nvPr/>
+        </p:nvCxnSpPr>
+        <p:spPr>
+          <a:xfrm flipV="1">
+            <a:off x="0" y="1224000"/>
+            <a:ext cx="576000" cy="576000"/>
+          </a:xfrm>
+          <a:prstGeom prst="line">
+            <a:avLst/>
+          </a:prstGeom>
+          <a:ln w="3600">
+            <a:solidFill>
+              <a:srgbClr val="12151C"/>
+            </a:solidFill>
+          </a:ln>
+        </p:spPr>
+      </p:cxnSp>
+      <p:cxnSp>
+        <p:nvCxnSpPr>
+          <p:cNvPr id="13" name="Connector 12"/>
+          <p:cNvCxnSpPr/>
+          <p:nvPr/>
+        </p:nvCxnSpPr>
+        <p:spPr>
+          <a:xfrm flipV="1">
+            <a:off x="57600" y="1224000"/>
+            <a:ext cx="576000" cy="576000"/>
+          </a:xfrm>
+          <a:prstGeom prst="line">
+            <a:avLst/>
+          </a:prstGeom>
+          <a:ln w="3600">
+            <a:solidFill>
+              <a:srgbClr val="12151C"/>
+            </a:solidFill>
+          </a:ln>
+        </p:spPr>
+      </p:cxnSp>
+      <p:cxnSp>
+        <p:nvCxnSpPr>
+          <p:cNvPr id="14" name="Connector 13"/>
+          <p:cNvCxnSpPr/>
+          <p:nvPr/>
+        </p:nvCxnSpPr>
+        <p:spPr>
+          <a:xfrm flipV="1">
+            <a:off x="115200" y="1224000"/>
+            <a:ext cx="576000" cy="576000"/>
+          </a:xfrm>
+          <a:prstGeom prst="line">
+            <a:avLst/>
+          </a:prstGeom>
+          <a:ln w="3600">
+            <a:solidFill>
+              <a:srgbClr val="12151C"/>
+            </a:solidFill>
+          </a:ln>
+        </p:spPr>
+      </p:cxnSp>
+      <p:cxnSp>
+        <p:nvCxnSpPr>
+          <p:cNvPr id="15" name="Connector 14"/>
+          <p:cNvCxnSpPr/>
+          <p:nvPr/>
+        </p:nvCxnSpPr>
+        <p:spPr>
+          <a:xfrm flipV="1">
+            <a:off x="172800" y="1224000"/>
+            <a:ext cx="576000" cy="576000"/>
+          </a:xfrm>
+          <a:prstGeom prst="line">
+            <a:avLst/>
+          </a:prstGeom>
+          <a:ln w="3600">
+            <a:solidFill>
+              <a:srgbClr val="12151C"/>
+            </a:solidFill>
+          </a:ln>
+        </p:spPr>
+      </p:cxnSp>
+      <p:cxnSp>
+        <p:nvCxnSpPr>
+          <p:cNvPr id="16" name="Connector 15"/>
+          <p:cNvCxnSpPr/>
+          <p:nvPr/>
+        </p:nvCxnSpPr>
+        <p:spPr>
+          <a:xfrm flipV="1">
+            <a:off x="230400" y="1224000"/>
+            <a:ext cx="576000" cy="576000"/>
+          </a:xfrm>
+          <a:prstGeom prst="line">
+            <a:avLst/>
+          </a:prstGeom>
+          <a:ln w="3600">
+            <a:solidFill>
+              <a:srgbClr val="12151C"/>
+            </a:solidFill>
+          </a:ln>
+        </p:spPr>
+      </p:cxnSp>
+      <p:cxnSp>
+        <p:nvCxnSpPr>
+          <p:cNvPr id="17" name="Connector 16"/>
+          <p:cNvCxnSpPr/>
+          <p:nvPr/>
+        </p:nvCxnSpPr>
+        <p:spPr>
+          <a:xfrm flipV="1">
+            <a:off x="288000" y="1224000"/>
+            <a:ext cx="576000" cy="576000"/>
+          </a:xfrm>
+          <a:prstGeom prst="line">
+            <a:avLst/>
+          </a:prstGeom>
+          <a:ln w="3600">
+            <a:solidFill>
+              <a:srgbClr val="12151C"/>
+            </a:solidFill>
+          </a:ln>
+        </p:spPr>
+      </p:cxnSp>
+      <p:cxnSp>
+        <p:nvCxnSpPr>
+          <p:cNvPr id="18" name="Connector 17"/>
+          <p:cNvCxnSpPr/>
+          <p:nvPr/>
+        </p:nvCxnSpPr>
+        <p:spPr>
+          <a:xfrm flipV="1">
+            <a:off x="345600" y="1224000"/>
+            <a:ext cx="576000" cy="576000"/>
+          </a:xfrm>
+          <a:prstGeom prst="line">
+            <a:avLst/>
+          </a:prstGeom>
+          <a:ln w="3600">
+            <a:solidFill>
+              <a:srgbClr val="12151C"/>
+            </a:solidFill>
+          </a:ln>
+        </p:spPr>
+      </p:cxnSp>
+      <p:cxnSp>
+        <p:nvCxnSpPr>
+          <p:cNvPr id="19" name="Connector 18"/>
+          <p:cNvCxnSpPr/>
+          <p:nvPr/>
+        </p:nvCxnSpPr>
+        <p:spPr>
+          <a:xfrm flipV="1">
+            <a:off x="403200" y="1224000"/>
+            <a:ext cx="576000" cy="576000"/>
+          </a:xfrm>
+          <a:prstGeom prst="line">
+            <a:avLst/>
+          </a:prstGeom>
+          <a:ln w="3600">
+            <a:solidFill>
+              <a:srgbClr val="12151C"/>
+            </a:solidFill>
+          </a:ln>
+        </p:spPr>
+      </p:cxnSp>
+      <p:cxnSp>
+        <p:nvCxnSpPr>
+          <p:cNvPr id="20" name="Connector 19"/>
+          <p:cNvCxnSpPr/>
+          <p:nvPr/>
+        </p:nvCxnSpPr>
+        <p:spPr>
+          <a:xfrm flipV="1">
+            <a:off x="460800" y="1224000"/>
+            <a:ext cx="576000" cy="576000"/>
+          </a:xfrm>
+          <a:prstGeom prst="line">
+            <a:avLst/>
+          </a:prstGeom>
+          <a:ln w="3600">
+            <a:solidFill>
+              <a:srgbClr val="12151C"/>
+            </a:solidFill>
+          </a:ln>
+        </p:spPr>
+      </p:cxnSp>
+      <p:cxnSp>
+        <p:nvCxnSpPr>
+          <p:cNvPr id="21" name="Connector 20"/>
+          <p:cNvCxnSpPr/>
+          <p:nvPr/>
+        </p:nvCxnSpPr>
+        <p:spPr>
+          <a:xfrm flipV="1">
+            <a:off x="518400" y="1224000"/>
+            <a:ext cx="576000" cy="576000"/>
+          </a:xfrm>
+          <a:prstGeom prst="line">
+            <a:avLst/>
+          </a:prstGeom>
+          <a:ln w="3600">
+            <a:solidFill>
+              <a:srgbClr val="12151C"/>
+            </a:solidFill>
+          </a:ln>
+        </p:spPr>
+      </p:cxnSp>
+      <p:cxnSp>
+        <p:nvCxnSpPr>
+          <p:cNvPr id="22" name="Connector 21"/>
+          <p:cNvCxnSpPr/>
+          <p:nvPr/>
+        </p:nvCxnSpPr>
+        <p:spPr>
+          <a:xfrm flipV="1">
+            <a:off x="576000" y="1224000"/>
+            <a:ext cx="576000" cy="576000"/>
+          </a:xfrm>
+          <a:prstGeom prst="line">
+            <a:avLst/>
+          </a:prstGeom>
+          <a:ln w="3600">
+            <a:solidFill>
+              <a:srgbClr val="12151C"/>
+            </a:solidFill>
+          </a:ln>
+        </p:spPr>
+      </p:cxnSp>
+      <p:cxnSp>
+        <p:nvCxnSpPr>
+          <p:cNvPr id="23" name="Connector 22"/>
+          <p:cNvCxnSpPr/>
+          <p:nvPr/>
+        </p:nvCxnSpPr>
+        <p:spPr>
+          <a:xfrm flipV="1">
+            <a:off x="633600" y="1245600"/>
+            <a:ext cx="554400" cy="554400"/>
+          </a:xfrm>
+          <a:prstGeom prst="line">
+            <a:avLst/>
+          </a:prstGeom>
+          <a:ln w="3600">
+            <a:solidFill>
+              <a:srgbClr val="12151C"/>
+            </a:solidFill>
+          </a:ln>
+        </p:spPr>
+      </p:cxnSp>
+      <p:cxnSp>
+        <p:nvCxnSpPr>
+          <p:cNvPr id="24" name="Connector 23"/>
+          <p:cNvCxnSpPr/>
+          <p:nvPr/>
+        </p:nvCxnSpPr>
+        <p:spPr>
+          <a:xfrm flipV="1">
+            <a:off x="691200" y="1303200"/>
+            <a:ext cx="496800" cy="496800"/>
+          </a:xfrm>
+          <a:prstGeom prst="line">
+            <a:avLst/>
+          </a:prstGeom>
+          <a:ln w="3600">
+            <a:solidFill>
+              <a:srgbClr val="12151C"/>
+            </a:solidFill>
+          </a:ln>
+        </p:spPr>
+      </p:cxnSp>
+      <p:cxnSp>
+        <p:nvCxnSpPr>
+          <p:cNvPr id="25" name="Connector 24"/>
+          <p:cNvCxnSpPr/>
+          <p:nvPr/>
+        </p:nvCxnSpPr>
+        <p:spPr>
+          <a:xfrm flipV="1">
+            <a:off x="748800" y="1360800"/>
+            <a:ext cx="439200" cy="439200"/>
+          </a:xfrm>
+          <a:prstGeom prst="line">
+            <a:avLst/>
+          </a:prstGeom>
+          <a:ln w="3600">
+            <a:solidFill>
+              <a:srgbClr val="12151C"/>
+            </a:solidFill>
+          </a:ln>
+        </p:spPr>
+      </p:cxnSp>
+      <p:cxnSp>
+        <p:nvCxnSpPr>
+          <p:cNvPr id="26" name="Connector 25"/>
+          <p:cNvCxnSpPr/>
+          <p:nvPr/>
+        </p:nvCxnSpPr>
+        <p:spPr>
+          <a:xfrm flipV="1">
+            <a:off x="806400" y="1418400"/>
+            <a:ext cx="381600" cy="381600"/>
+          </a:xfrm>
+          <a:prstGeom prst="line">
+            <a:avLst/>
+          </a:prstGeom>
+          <a:ln w="3600">
+            <a:solidFill>
+              <a:srgbClr val="12151C"/>
+            </a:solidFill>
+          </a:ln>
+        </p:spPr>
+      </p:cxnSp>
+      <p:cxnSp>
+        <p:nvCxnSpPr>
+          <p:cNvPr id="27" name="Connector 26"/>
+          <p:cNvCxnSpPr/>
+          <p:nvPr/>
+        </p:nvCxnSpPr>
+        <p:spPr>
+          <a:xfrm flipV="1">
+            <a:off x="864000" y="1476000"/>
+            <a:ext cx="324000" cy="324000"/>
+          </a:xfrm>
+          <a:prstGeom prst="line">
+            <a:avLst/>
+          </a:prstGeom>
+          <a:ln w="3600">
+            <a:solidFill>
+              <a:srgbClr val="12151C"/>
+            </a:solidFill>
+          </a:ln>
+        </p:spPr>
+      </p:cxnSp>
+      <p:cxnSp>
+        <p:nvCxnSpPr>
+          <p:cNvPr id="28" name="Connector 27"/>
+          <p:cNvCxnSpPr/>
+          <p:nvPr/>
+        </p:nvCxnSpPr>
+        <p:spPr>
+          <a:xfrm flipV="1">
+            <a:off x="921600" y="1533600"/>
+            <a:ext cx="266400" cy="266400"/>
+          </a:xfrm>
+          <a:prstGeom prst="line">
+            <a:avLst/>
+          </a:prstGeom>
+          <a:ln w="3600">
+            <a:solidFill>
+              <a:srgbClr val="12151C"/>
+            </a:solidFill>
+          </a:ln>
+        </p:spPr>
+      </p:cxnSp>
+      <p:cxnSp>
+        <p:nvCxnSpPr>
+          <p:cNvPr id="29" name="Connector 28"/>
+          <p:cNvCxnSpPr/>
+          <p:nvPr/>
+        </p:nvCxnSpPr>
+        <p:spPr>
+          <a:xfrm flipV="1">
+            <a:off x="979200" y="1591200"/>
+            <a:ext cx="208800" cy="208800"/>
+          </a:xfrm>
+          <a:prstGeom prst="line">
+            <a:avLst/>
+          </a:prstGeom>
+          <a:ln w="3600">
+            <a:solidFill>
+              <a:srgbClr val="12151C"/>
+            </a:solidFill>
+          </a:ln>
+        </p:spPr>
+      </p:cxnSp>
+      <p:cxnSp>
+        <p:nvCxnSpPr>
+          <p:cNvPr id="30" name="Connector 29"/>
+          <p:cNvCxnSpPr/>
+          <p:nvPr/>
+        </p:nvCxnSpPr>
+        <p:spPr>
+          <a:xfrm flipV="1">
+            <a:off x="1036800" y="1648800"/>
+            <a:ext cx="151200" cy="151200"/>
+          </a:xfrm>
+          <a:prstGeom prst="line">
+            <a:avLst/>
+          </a:prstGeom>
+          <a:ln w="3600">
+            <a:solidFill>
+              <a:srgbClr val="12151C"/>
+            </a:solidFill>
+          </a:ln>
+        </p:spPr>
+      </p:cxnSp>
+      <p:cxnSp>
+        <p:nvCxnSpPr>
+          <p:cNvPr id="31" name="Connector 30"/>
+          <p:cNvCxnSpPr/>
+          <p:nvPr/>
+        </p:nvCxnSpPr>
+        <p:spPr>
+          <a:xfrm flipV="1">
+            <a:off x="1094400" y="1706400"/>
+            <a:ext cx="93600" cy="93600"/>
+          </a:xfrm>
+          <a:prstGeom prst="line">
+            <a:avLst/>
+          </a:prstGeom>
+          <a:ln w="3600">
+            <a:solidFill>
+              <a:srgbClr val="12151C"/>
+            </a:solidFill>
+          </a:ln>
+        </p:spPr>
+      </p:cxnSp>
+      <p:cxnSp>
+        <p:nvCxnSpPr>
+          <p:cNvPr id="32" name="Connector 31"/>
+          <p:cNvCxnSpPr/>
+          <p:nvPr/>
+        </p:nvCxnSpPr>
+        <p:spPr>
+          <a:xfrm flipV="1">
+            <a:off x="1152000" y="1764000"/>
+            <a:ext cx="36000" cy="36000"/>
+          </a:xfrm>
+          <a:prstGeom prst="line">
+            <a:avLst/>
+          </a:prstGeom>
+          <a:ln w="3600">
+            <a:solidFill>
+              <a:srgbClr val="12151C"/>
+            </a:solidFill>
+          </a:ln>
+        </p:spPr>
+      </p:cxnSp>
+      <p:sp>
+        <p:nvSpPr>
+          <p:cNvPr id="33" name="Oval 32"/>
+          <p:cNvSpPr/>
+          <p:nvPr/>
+        </p:nvSpPr>
+        <p:spPr>
+          <a:xfrm>
+            <a:off x="216000" y="252000"/>
+            <a:ext cx="288000" cy="288000"/>
+          </a:xfrm>
+          <a:prstGeom prst="ellipse">
+            <a:avLst/>
+          </a:prstGeom>
+          <a:noFill/>
+          <a:ln w="5760">
+            <a:solidFill>
+              <a:srgbClr val="12151C"/>
+            </a:solidFill>
+          </a:ln>
+        </p:spPr>
         <p:txBody>
           <a:bodyPr rtlCol="0" anchor="ctr"/>
           <a:lstStyle/>
@@ -3632,14 +4313,14 @@
       </p:sp>
       <p:sp>
         <p:nvSpPr>
-          <p:cNvPr id="4" name="텍스트"/>
+          <p:cNvPr id="34" name="텍스트"/>
           <p:cNvSpPr txBox="1"/>
           <p:nvPr/>
         </p:nvSpPr>
         <p:spPr>
           <a:xfrm>
-            <a:off x="2304000" y="684000"/>
-            <a:ext cx="720000" cy="432000"/>
+            <a:off x="216000" y="252000"/>
+            <a:ext cx="288000" cy="288000"/>
           </a:xfrm>
           <a:prstGeom prst="rect">
             <a:avLst/>
@@ -3654,11 +4335,11 @@
           <a:p>
             <a:pPr algn="ctr">
               <a:lnSpc>
-                <a:spcPts val="4350"/>
+                <a:spcPts val="2030"/>
               </a:lnSpc>
             </a:pPr>
             <a:r>
-              <a:rPr sz="3000" b="1">
+              <a:rPr sz="1400" b="1">
                 <a:solidFill>
                   <a:srgbClr val="12151C"/>
                 </a:solidFill>
@@ -3672,14 +4353,14 @@
       </p:sp>
       <p:sp>
         <p:nvSpPr>
-          <p:cNvPr id="5" name="텍스트"/>
+          <p:cNvPr id="35" name="텍스트"/>
           <p:cNvSpPr txBox="1"/>
           <p:nvPr/>
         </p:nvSpPr>
         <p:spPr>
           <a:xfrm>
-            <a:off x="252000" y="540000"/>
-            <a:ext cx="1620000" cy="720000"/>
+            <a:off x="216000" y="1440000"/>
+            <a:ext cx="828000" cy="142876"/>
           </a:xfrm>
           <a:prstGeom prst="rect">
             <a:avLst/>
@@ -3694,49 +4375,154 @@
           <a:p>
             <a:pPr algn="l">
               <a:lnSpc>
-                <a:spcPts val="1739"/>
+                <a:spcPts val="1087"/>
               </a:lnSpc>
             </a:pPr>
             <a:r>
-              <a:rPr sz="1200" b="1">
+              <a:rPr sz="750" b="1" spc="100">
                 <a:solidFill>
                   <a:srgbClr val="12151C"/>
                 </a:solidFill>
                 <a:latin typeface="맑은 고딕"/>
                 <a:ea typeface="맑은 고딕"/>
               </a:rPr>
-              <a:t>향긋한 커피와</a:t>
-            </a:r>
-          </a:p>
+              <a:t>대표 메뉴</a:t>
+            </a:r>
+          </a:p>
+        </p:txBody>
+      </p:sp>
+      <p:sp>
+        <p:nvSpPr>
+          <p:cNvPr id="36" name="텍스트"/>
+          <p:cNvSpPr txBox="1"/>
+          <p:nvPr/>
+        </p:nvSpPr>
+        <p:spPr>
+          <a:xfrm>
+            <a:off x="1440000" y="223200"/>
+            <a:ext cx="1080000" cy="99061"/>
+          </a:xfrm>
+          <a:prstGeom prst="rect">
+            <a:avLst/>
+          </a:prstGeom>
+          <a:noFill/>
+        </p:spPr>
+        <p:txBody>
+          <a:bodyPr wrap="square" lIns="0" rIns="0" tIns="0" bIns="0" anchor="t">
+            <a:spAutoFit/>
+          </a:bodyPr>
+          <a:lstStyle/>
           <a:p>
             <a:pPr algn="l">
               <a:lnSpc>
-                <a:spcPts val="1739"/>
+                <a:spcPts val="754"/>
               </a:lnSpc>
             </a:pPr>
             <a:r>
-              <a:rPr sz="1200" b="1">
+              <a:rPr sz="520" b="1" spc="240">
+                <a:solidFill>
+                  <a:srgbClr val="6B7280"/>
+                </a:solidFill>
+                <a:latin typeface="맑은 고딕"/>
+                <a:ea typeface="맑은 고딕"/>
+              </a:rPr>
+              <a:t>대표 메뉴</a:t>
+            </a:r>
+          </a:p>
+        </p:txBody>
+      </p:sp>
+      <p:cxnSp>
+        <p:nvCxnSpPr>
+          <p:cNvPr id="37" name="Connector 36"/>
+          <p:cNvCxnSpPr/>
+          <p:nvPr/>
+        </p:nvCxnSpPr>
+        <p:spPr>
+          <a:xfrm>
+            <a:off x="1440000" y="360000"/>
+            <a:ext cx="1548000" cy="0"/>
+          </a:xfrm>
+          <a:prstGeom prst="line">
+            <a:avLst/>
+          </a:prstGeom>
+          <a:ln w="3600">
+            <a:solidFill>
+              <a:srgbClr val="DCDFE4"/>
+            </a:solidFill>
+          </a:ln>
+        </p:spPr>
+      </p:cxnSp>
+      <p:sp>
+        <p:nvSpPr>
+          <p:cNvPr id="38" name="텍스트"/>
+          <p:cNvSpPr txBox="1"/>
+          <p:nvPr/>
+        </p:nvSpPr>
+        <p:spPr>
+          <a:xfrm>
+            <a:off x="1440000" y="403200"/>
+            <a:ext cx="1296000" cy="133351"/>
+          </a:xfrm>
+          <a:prstGeom prst="rect">
+            <a:avLst/>
+          </a:prstGeom>
+          <a:noFill/>
+        </p:spPr>
+        <p:txBody>
+          <a:bodyPr wrap="square" lIns="0" rIns="0" tIns="0" bIns="0" anchor="t">
+            <a:spAutoFit/>
+          </a:bodyPr>
+          <a:lstStyle/>
+          <a:p>
+            <a:pPr algn="l">
+              <a:lnSpc>
+                <a:spcPts val="1015"/>
+              </a:lnSpc>
+            </a:pPr>
+            <a:r>
+              <a:rPr sz="700" b="0">
                 <a:solidFill>
                   <a:srgbClr val="12151C"/>
                 </a:solidFill>
                 <a:latin typeface="맑은 고딕"/>
                 <a:ea typeface="맑은 고딕"/>
               </a:rPr>
-              <a:t>다정한 인사</a:t>
-            </a:r>
-          </a:p>
-        </p:txBody>
-      </p:sp>
-      <p:sp>
-        <p:nvSpPr>
-          <p:cNvPr id="6" name="텍스트"/>
+              <a:t>아메리카노</a:t>
+            </a:r>
+          </a:p>
+        </p:txBody>
+      </p:sp>
+      <p:cxnSp>
+        <p:nvCxnSpPr>
+          <p:cNvPr id="39" name="Connector 38"/>
+          <p:cNvCxnSpPr/>
+          <p:nvPr/>
+        </p:nvCxnSpPr>
+        <p:spPr>
+          <a:xfrm>
+            <a:off x="1440000" y="561600"/>
+            <a:ext cx="1548000" cy="0"/>
+          </a:xfrm>
+          <a:prstGeom prst="line">
+            <a:avLst/>
+          </a:prstGeom>
+          <a:ln w="3600">
+            <a:solidFill>
+              <a:srgbClr val="DCDFE4"/>
+            </a:solidFill>
+          </a:ln>
+        </p:spPr>
+      </p:cxnSp>
+      <p:sp>
+        <p:nvSpPr>
+          <p:cNvPr id="40" name="텍스트"/>
           <p:cNvSpPr txBox="1"/>
           <p:nvPr/>
         </p:nvSpPr>
         <p:spPr>
           <a:xfrm>
-            <a:off x="252000" y="1512000"/>
-            <a:ext cx="1584000" cy="123826"/>
+            <a:off x="1440000" y="604800"/>
+            <a:ext cx="1296000" cy="133351"/>
           </a:xfrm>
           <a:prstGeom prst="rect">
             <a:avLst/>
@@ -3751,18 +4537,140 @@
           <a:p>
             <a:pPr algn="l">
               <a:lnSpc>
-                <a:spcPts val="942"/>
+                <a:spcPts val="1015"/>
               </a:lnSpc>
             </a:pPr>
             <a:r>
-              <a:rPr sz="650" b="1" spc="200">
+              <a:rPr sz="700" b="0">
+                <a:solidFill>
+                  <a:srgbClr val="12151C"/>
+                </a:solidFill>
+                <a:latin typeface="맑은 고딕"/>
+                <a:ea typeface="맑은 고딕"/>
+              </a:rPr>
+              <a:t>단체 주문</a:t>
+            </a:r>
+          </a:p>
+        </p:txBody>
+      </p:sp>
+      <p:cxnSp>
+        <p:nvCxnSpPr>
+          <p:cNvPr id="41" name="Connector 40"/>
+          <p:cNvCxnSpPr/>
+          <p:nvPr/>
+        </p:nvCxnSpPr>
+        <p:spPr>
+          <a:xfrm>
+            <a:off x="1440000" y="763200"/>
+            <a:ext cx="1548000" cy="0"/>
+          </a:xfrm>
+          <a:prstGeom prst="line">
+            <a:avLst/>
+          </a:prstGeom>
+          <a:ln w="3600">
+            <a:solidFill>
+              <a:srgbClr val="DCDFE4"/>
+            </a:solidFill>
+          </a:ln>
+        </p:spPr>
+      </p:cxnSp>
+      <p:sp>
+        <p:nvSpPr>
+          <p:cNvPr id="42" name="텍스트"/>
+          <p:cNvSpPr txBox="1"/>
+          <p:nvPr/>
+        </p:nvSpPr>
+        <p:spPr>
+          <a:xfrm>
+            <a:off x="1440000" y="806400"/>
+            <a:ext cx="1296000" cy="133351"/>
+          </a:xfrm>
+          <a:prstGeom prst="rect">
+            <a:avLst/>
+          </a:prstGeom>
+          <a:noFill/>
+        </p:spPr>
+        <p:txBody>
+          <a:bodyPr wrap="square" lIns="0" rIns="0" tIns="0" bIns="0" anchor="t">
+            <a:spAutoFit/>
+          </a:bodyPr>
+          <a:lstStyle/>
+          <a:p>
+            <a:pPr algn="l">
+              <a:lnSpc>
+                <a:spcPts val="1015"/>
+              </a:lnSpc>
+            </a:pPr>
+            <a:r>
+              <a:rPr sz="700" b="0">
+                <a:solidFill>
+                  <a:srgbClr val="12151C"/>
+                </a:solidFill>
+                <a:latin typeface="맑은 고딕"/>
+                <a:ea typeface="맑은 고딕"/>
+              </a:rPr>
+              <a:t>런치 세트</a:t>
+            </a:r>
+          </a:p>
+        </p:txBody>
+      </p:sp>
+      <p:cxnSp>
+        <p:nvCxnSpPr>
+          <p:cNvPr id="43" name="Connector 42"/>
+          <p:cNvCxnSpPr/>
+          <p:nvPr/>
+        </p:nvCxnSpPr>
+        <p:spPr>
+          <a:xfrm>
+            <a:off x="1440000" y="964800"/>
+            <a:ext cx="1548000" cy="0"/>
+          </a:xfrm>
+          <a:prstGeom prst="line">
+            <a:avLst/>
+          </a:prstGeom>
+          <a:ln w="3600">
+            <a:solidFill>
+              <a:srgbClr val="DCDFE4"/>
+            </a:solidFill>
+          </a:ln>
+        </p:spPr>
+      </p:cxnSp>
+      <p:sp>
+        <p:nvSpPr>
+          <p:cNvPr id="44" name="텍스트"/>
+          <p:cNvSpPr txBox="1"/>
+          <p:nvPr/>
+        </p:nvSpPr>
+        <p:spPr>
+          <a:xfrm>
+            <a:off x="1440000" y="1569600"/>
+            <a:ext cx="1548000" cy="114301"/>
+          </a:xfrm>
+          <a:prstGeom prst="rect">
+            <a:avLst/>
+          </a:prstGeom>
+          <a:noFill/>
+        </p:spPr>
+        <p:txBody>
+          <a:bodyPr wrap="square" lIns="0" rIns="0" tIns="0" bIns="0" anchor="t">
+            <a:spAutoFit/>
+          </a:bodyPr>
+          <a:lstStyle/>
+          <a:p>
+            <a:pPr algn="l">
+              <a:lnSpc>
+                <a:spcPts val="869"/>
+              </a:lnSpc>
+            </a:pPr>
+            <a:r>
+              <a:rPr sz="600" b="0">
                 <a:solidFill>
                   <a:srgbClr val="6B7280"/>
                 </a:solidFill>
                 <a:latin typeface="맑은 고딕"/>
                 <a:ea typeface="맑은 고딕"/>
               </a:rPr>
-              <a:t>상호명</a:t>
+              <a:t>매일 10:00 – 22:00   |   @아이디</a:t>
             </a:r>
           </a:p>
         </p:txBody>
